--- a/Sentiment Analysis.pptx
+++ b/Sentiment Analysis.pptx
@@ -137,7 +137,7 @@
   <pc:docChgLst>
     <pc:chgData name="Alex Crest" userId="a18192cee22b14ef" providerId="LiveId" clId="{F6A4E89F-FC5E-4687-BAB0-B17DCCBD5A4A}"/>
     <pc:docChg chg="custSel addSld delSld modSld sldOrd">
-      <pc:chgData name="Alex Crest" userId="a18192cee22b14ef" providerId="LiveId" clId="{F6A4E89F-FC5E-4687-BAB0-B17DCCBD5A4A}" dt="2026-04-13T11:08:44.531" v="4171"/>
+      <pc:chgData name="Alex Crest" userId="a18192cee22b14ef" providerId="LiveId" clId="{F6A4E89F-FC5E-4687-BAB0-B17DCCBD5A4A}" dt="2026-04-13T13:00:22.254" v="4222" actId="20577"/>
       <pc:docMkLst>
         <pc:docMk/>
       </pc:docMkLst>
@@ -157,7 +157,7 @@
         </pc:spChg>
       </pc:sldChg>
       <pc:sldChg chg="addSp delSp modSp mod modNotesTx">
-        <pc:chgData name="Alex Crest" userId="a18192cee22b14ef" providerId="LiveId" clId="{F6A4E89F-FC5E-4687-BAB0-B17DCCBD5A4A}" dt="2026-04-13T11:08:44.531" v="4171"/>
+        <pc:chgData name="Alex Crest" userId="a18192cee22b14ef" providerId="LiveId" clId="{F6A4E89F-FC5E-4687-BAB0-B17DCCBD5A4A}" dt="2026-04-13T13:00:22.254" v="4222" actId="20577"/>
         <pc:sldMkLst>
           <pc:docMk/>
           <pc:sldMk cId="2577635408" sldId="257"/>
@@ -171,7 +171,7 @@
           </ac:spMkLst>
         </pc:spChg>
         <pc:spChg chg="add mod">
-          <ac:chgData name="Alex Crest" userId="a18192cee22b14ef" providerId="LiveId" clId="{F6A4E89F-FC5E-4687-BAB0-B17DCCBD5A4A}" dt="2026-04-13T11:08:44.531" v="4171"/>
+          <ac:chgData name="Alex Crest" userId="a18192cee22b14ef" providerId="LiveId" clId="{F6A4E89F-FC5E-4687-BAB0-B17DCCBD5A4A}" dt="2026-04-13T13:00:22.254" v="4222" actId="20577"/>
           <ac:spMkLst>
             <pc:docMk/>
             <pc:sldMk cId="2577635408" sldId="257"/>
@@ -7801,7 +7801,7 @@
         <p:spPr>
           <a:xfrm>
             <a:off x="354842" y="1351128"/>
-            <a:ext cx="8760283" cy="3139321"/>
+            <a:ext cx="8760283" cy="2585323"/>
           </a:xfrm>
           <a:prstGeom prst="rect">
             <a:avLst/>
@@ -7834,7 +7834,7 @@
           <a:p>
             <a:r>
               <a:rPr lang="en-GB" dirty="0"/>
-              <a:t>14:20 - 15:10 3) A Comparative look at Three Examples</a:t>
+              <a:t>14:20 - 15:30 3) A Comparative look at Three Examples (with a 10 minute break)</a:t>
             </a:r>
           </a:p>
           <a:p>
@@ -7843,7 +7843,7 @@
           <a:p>
             <a:r>
               <a:rPr lang="en-GB" dirty="0"/>
-              <a:t>15:10 - 15:20 4) Comfort Break</a:t>
+              <a:t>15:30 - 15:50 5) Analysing Sentiment Scores: Outputs, Variables and Understanding</a:t>
             </a:r>
           </a:p>
           <a:p>
@@ -7852,22 +7852,8 @@
           <a:p>
             <a:r>
               <a:rPr lang="en-GB" dirty="0"/>
-              <a:t>15:20 - 15:50 5) Analysing Sentiment Scores: Outputs, Variables and Understanding</a:t>
-            </a:r>
-          </a:p>
-          <a:p>
-            <a:endParaRPr lang="en-GB" dirty="0"/>
-          </a:p>
-          <a:p>
-            <a:r>
-              <a:rPr lang="en-GB" dirty="0"/>
-              <a:t>15:50 - 16:00 6) Final Q and A. </a:t>
-            </a:r>
-            <a:r>
-              <a:rPr lang="en-GB"/>
-              <a:t>Complete up to here</a:t>
-            </a:r>
-            <a:endParaRPr lang="en-GB" dirty="0"/>
+              <a:t>15:50 - 16:00 6) Final Q and A. Complete up to here</a:t>
+            </a:r>
           </a:p>
         </p:txBody>
       </p:sp>
@@ -9601,6 +9587,15 @@
 </file>
 
 <file path=customXml/item1.xml><?xml version="1.0" encoding="utf-8"?>
+<?mso-contentType ?>
+<FormTemplates xmlns="http://schemas.microsoft.com/sharepoint/v3/contenttype/forms">
+  <Display>DocumentLibraryForm</Display>
+  <Edit>DocumentLibraryForm</Edit>
+  <New>DocumentLibraryForm</New>
+</FormTemplates>
+</file>
+
+<file path=customXml/item2.xml><?xml version="1.0" encoding="utf-8"?>
 <ct:contentTypeSchema xmlns:ct="http://schemas.microsoft.com/office/2006/metadata/contentType" xmlns:ma="http://schemas.microsoft.com/office/2006/metadata/properties/metaAttributes" ct:_="" ma:_="" ma:contentTypeName="Document" ma:contentTypeID="0x010100A6FA43870EC3F1479C794ECA0A85DC3A" ma:contentTypeVersion="2" ma:contentTypeDescription="Create a new document." ma:contentTypeScope="" ma:versionID="064810d467210a95de952a583c0e092c">
   <xsd:schema xmlns:xsd="http://www.w3.org/2001/XMLSchema" xmlns:xs="http://www.w3.org/2001/XMLSchema" xmlns:p="http://schemas.microsoft.com/office/2006/metadata/properties" xmlns:ns2="b364318b-48cb-49ac-ac49-de67ddd977f7" targetNamespace="http://schemas.microsoft.com/office/2006/metadata/properties" ma:root="true" ma:fieldsID="691b68d22381f767a6817b4c67c58c89" ns2:_="">
     <xsd:import namespace="b364318b-48cb-49ac-ac49-de67ddd977f7"/>
@@ -9732,15 +9727,6 @@
 </ct:contentTypeSchema>
 </file>
 
-<file path=customXml/item2.xml><?xml version="1.0" encoding="utf-8"?>
-<?mso-contentType ?>
-<FormTemplates xmlns="http://schemas.microsoft.com/sharepoint/v3/contenttype/forms">
-  <Display>DocumentLibraryForm</Display>
-  <Edit>DocumentLibraryForm</Edit>
-  <New>DocumentLibraryForm</New>
-</FormTemplates>
-</file>
-
 <file path=customXml/item3.xml><?xml version="1.0" encoding="utf-8"?>
 <p:properties xmlns:p="http://schemas.microsoft.com/office/2006/metadata/properties" xmlns:xsi="http://www.w3.org/2001/XMLSchema-instance" xmlns:pc="http://schemas.microsoft.com/office/infopath/2007/PartnerControls">
   <documentManagement/>
@@ -9748,6 +9734,14 @@
 </file>
 
 <file path=customXml/itemProps1.xml><?xml version="1.0" encoding="utf-8"?>
+<ds:datastoreItem xmlns:ds="http://schemas.openxmlformats.org/officeDocument/2006/customXml" ds:itemID="{788658A8-8C4E-41E7-AE7E-2016A5FB5267}">
+  <ds:schemaRefs>
+    <ds:schemaRef ds:uri="http://schemas.microsoft.com/sharepoint/v3/contenttype/forms"/>
+  </ds:schemaRefs>
+</ds:datastoreItem>
+</file>
+
+<file path=customXml/itemProps2.xml><?xml version="1.0" encoding="utf-8"?>
 <ds:datastoreItem xmlns:ds="http://schemas.openxmlformats.org/officeDocument/2006/customXml" ds:itemID="{DCB836F7-82AF-4E23-9D21-9859FC9D55C1}">
   <ds:schemaRefs>
     <ds:schemaRef ds:uri="http://schemas.microsoft.com/office/2006/metadata/contentType"/>
@@ -9761,14 +9755,6 @@
     <ds:schemaRef ds:uri="http://purl.org/dc/elements/1.1/"/>
     <ds:schemaRef ds:uri="http://purl.org/dc/terms/"/>
     <ds:schemaRef ds:uri="http://schemas.microsoft.com/internal/obd"/>
-  </ds:schemaRefs>
-</ds:datastoreItem>
-</file>
-
-<file path=customXml/itemProps2.xml><?xml version="1.0" encoding="utf-8"?>
-<ds:datastoreItem xmlns:ds="http://schemas.openxmlformats.org/officeDocument/2006/customXml" ds:itemID="{788658A8-8C4E-41E7-AE7E-2016A5FB5267}">
-  <ds:schemaRefs>
-    <ds:schemaRef ds:uri="http://schemas.microsoft.com/sharepoint/v3/contenttype/forms"/>
   </ds:schemaRefs>
 </ds:datastoreItem>
 </file>
